--- a/Innovate2026-AgenticWorkflows.pptx
+++ b/Innovate2026-AgenticWorkflows.pptx
@@ -2856,48 +2856,9 @@
                 <a:ea typeface="Segoe UI" pitchFamily="34" charset="-122"/>
                 <a:cs typeface="Segoe UI" pitchFamily="34" charset="-120"/>
               </a:rPr>
-              <a:t>CBRE Innovate 2026</a:t>
+              <a:t>Innovate 2026</a:t>
             </a:r>
             <a:endParaRPr lang="en-US" sz="2000" dirty="0"/>
-          </a:p>
-        </p:txBody>
-      </p:sp>
-      <p:sp>
-        <p:nvSpPr>
-          <p:cNvPr id="55" name="Text 53"/>
-          <p:cNvSpPr/>
-          <p:nvPr/>
-        </p:nvSpPr>
-        <p:spPr>
-          <a:xfrm>
-            <a:off x="731520" y="5715000"/>
-            <a:ext cx="5486400" cy="365760"/>
-          </a:xfrm>
-          <a:prstGeom prst="rect">
-            <a:avLst/>
-          </a:prstGeom>
-          <a:noFill/>
-          <a:ln/>
-        </p:spPr>
-        <p:txBody>
-          <a:bodyPr wrap="square" rtlCol="0" anchor="ctr"/>
-          <a:lstStyle/>
-          <a:p>
-            <a:pPr marL="0" indent="0">
-              <a:buNone/>
-            </a:pPr>
-            <a:r>
-              <a:rPr lang="en-US" sz="1600" dirty="0">
-                <a:solidFill>
-                  <a:srgbClr val="484F58"/>
-                </a:solidFill>
-                <a:latin typeface="Segoe UI" pitchFamily="34" charset="0"/>
-                <a:ea typeface="Segoe UI" pitchFamily="34" charset="-122"/>
-                <a:cs typeface="Segoe UI" pitchFamily="34" charset="-120"/>
-              </a:rPr>
-              <a:t>Monday, April 20 · 8:00 AM CT</a:t>
-            </a:r>
-            <a:endParaRPr lang="en-US" sz="1600" dirty="0"/>
           </a:p>
         </p:txBody>
       </p:sp>
@@ -2986,7 +2947,7 @@
               <a:buNone/>
             </a:pPr>
             <a:r>
-              <a:rPr lang="en-US" sz="1000" dirty="0">
+              <a:rPr lang="en-US" sz="1000">
                 <a:solidFill>
                   <a:srgbClr val="484F58"/>
                 </a:solidFill>
@@ -2994,7 +2955,18 @@
                 <a:ea typeface="Segoe UI" pitchFamily="34" charset="-122"/>
                 <a:cs typeface="Segoe UI" pitchFamily="34" charset="-120"/>
               </a:rPr>
-              <a:t>CBRE Innovate 2026  ·  ADO/GitHub with Microsoft</a:t>
+              <a:t>Innovate </a:t>
+            </a:r>
+            <a:r>
+              <a:rPr lang="en-US" sz="1000" dirty="0">
+                <a:solidFill>
+                  <a:srgbClr val="484F58"/>
+                </a:solidFill>
+                <a:latin typeface="Segoe UI" pitchFamily="34" charset="0"/>
+                <a:ea typeface="Segoe UI" pitchFamily="34" charset="-122"/>
+                <a:cs typeface="Segoe UI" pitchFamily="34" charset="-120"/>
+              </a:rPr>
+              <a:t>2026  ·  ADO/GitHub with Microsoft</a:t>
             </a:r>
             <a:endParaRPr lang="en-US" sz="1000" dirty="0"/>
           </a:p>
@@ -3771,7 +3743,7 @@
                 <a:ea typeface="Segoe UI" pitchFamily="34" charset="-122"/>
                 <a:cs typeface="Segoe UI" pitchFamily="34" charset="-120"/>
               </a:rPr>
-              <a:t>CBRE Innovate 2026  ·  ADO/GitHub with Microsoft</a:t>
+              <a:t>Innovate 2026  ·  ADO/GitHub with Microsoft</a:t>
             </a:r>
             <a:endParaRPr lang="en-US" sz="1000" dirty="0"/>
           </a:p>
@@ -6646,7 +6618,7 @@
                 <a:ea typeface="Segoe UI" pitchFamily="34" charset="-122"/>
                 <a:cs typeface="Segoe UI" pitchFamily="34" charset="-120"/>
               </a:rPr>
-              <a:t>CBRE Innovate 2026  ·  ADO/GitHub with Microsoft</a:t>
+              <a:t>Innovate 2026  ·  ADO/GitHub with Microsoft</a:t>
             </a:r>
             <a:endParaRPr lang="en-US" sz="1000" dirty="0"/>
           </a:p>
@@ -8590,7 +8562,7 @@
                 <a:ea typeface="Segoe UI" pitchFamily="34" charset="-122"/>
                 <a:cs typeface="Segoe UI" pitchFamily="34" charset="-120"/>
               </a:rPr>
-              <a:t>CBRE Innovate 2026  ·  ADO/GitHub with Microsoft</a:t>
+              <a:t>Innovate 2026  ·  ADO/GitHub with Microsoft</a:t>
             </a:r>
             <a:endParaRPr lang="en-US" sz="1000" dirty="0"/>
           </a:p>
@@ -10318,7 +10290,7 @@
                 <a:ea typeface="Segoe UI" pitchFamily="34" charset="-122"/>
                 <a:cs typeface="Segoe UI" pitchFamily="34" charset="-120"/>
               </a:rPr>
-              <a:t>CBRE Innovate 2026  ·  ADO/GitHub with Microsoft</a:t>
+              <a:t>Innovate 2026  ·  ADO/GitHub with Microsoft</a:t>
             </a:r>
             <a:endParaRPr lang="en-US" sz="1000" dirty="0"/>
           </a:p>
